--- a/PPNJ/dashboard/bg creation.pptx
+++ b/PPNJ/dashboard/bg creation.pptx
@@ -262,7 +262,7 @@
           <a:p>
             <a:fld id="{21F19ACD-48F4-409C-8597-BFCE65646A84}" type="datetimeFigureOut">
               <a:rPr lang="en-MY" smtClean="0"/>
-              <a:t>16/7/2025</a:t>
+              <a:t>17/7/2025</a:t>
             </a:fld>
             <a:endParaRPr lang="en-MY"/>
           </a:p>
@@ -462,7 +462,7 @@
           <a:p>
             <a:fld id="{21F19ACD-48F4-409C-8597-BFCE65646A84}" type="datetimeFigureOut">
               <a:rPr lang="en-MY" smtClean="0"/>
-              <a:t>16/7/2025</a:t>
+              <a:t>17/7/2025</a:t>
             </a:fld>
             <a:endParaRPr lang="en-MY"/>
           </a:p>
@@ -672,7 +672,7 @@
           <a:p>
             <a:fld id="{21F19ACD-48F4-409C-8597-BFCE65646A84}" type="datetimeFigureOut">
               <a:rPr lang="en-MY" smtClean="0"/>
-              <a:t>16/7/2025</a:t>
+              <a:t>17/7/2025</a:t>
             </a:fld>
             <a:endParaRPr lang="en-MY"/>
           </a:p>
@@ -872,7 +872,7 @@
           <a:p>
             <a:fld id="{21F19ACD-48F4-409C-8597-BFCE65646A84}" type="datetimeFigureOut">
               <a:rPr lang="en-MY" smtClean="0"/>
-              <a:t>16/7/2025</a:t>
+              <a:t>17/7/2025</a:t>
             </a:fld>
             <a:endParaRPr lang="en-MY"/>
           </a:p>
@@ -1148,7 +1148,7 @@
           <a:p>
             <a:fld id="{21F19ACD-48F4-409C-8597-BFCE65646A84}" type="datetimeFigureOut">
               <a:rPr lang="en-MY" smtClean="0"/>
-              <a:t>16/7/2025</a:t>
+              <a:t>17/7/2025</a:t>
             </a:fld>
             <a:endParaRPr lang="en-MY"/>
           </a:p>
@@ -1416,7 +1416,7 @@
           <a:p>
             <a:fld id="{21F19ACD-48F4-409C-8597-BFCE65646A84}" type="datetimeFigureOut">
               <a:rPr lang="en-MY" smtClean="0"/>
-              <a:t>16/7/2025</a:t>
+              <a:t>17/7/2025</a:t>
             </a:fld>
             <a:endParaRPr lang="en-MY"/>
           </a:p>
@@ -1831,7 +1831,7 @@
           <a:p>
             <a:fld id="{21F19ACD-48F4-409C-8597-BFCE65646A84}" type="datetimeFigureOut">
               <a:rPr lang="en-MY" smtClean="0"/>
-              <a:t>16/7/2025</a:t>
+              <a:t>17/7/2025</a:t>
             </a:fld>
             <a:endParaRPr lang="en-MY"/>
           </a:p>
@@ -1973,7 +1973,7 @@
           <a:p>
             <a:fld id="{21F19ACD-48F4-409C-8597-BFCE65646A84}" type="datetimeFigureOut">
               <a:rPr lang="en-MY" smtClean="0"/>
-              <a:t>16/7/2025</a:t>
+              <a:t>17/7/2025</a:t>
             </a:fld>
             <a:endParaRPr lang="en-MY"/>
           </a:p>
@@ -2086,7 +2086,7 @@
           <a:p>
             <a:fld id="{21F19ACD-48F4-409C-8597-BFCE65646A84}" type="datetimeFigureOut">
               <a:rPr lang="en-MY" smtClean="0"/>
-              <a:t>16/7/2025</a:t>
+              <a:t>17/7/2025</a:t>
             </a:fld>
             <a:endParaRPr lang="en-MY"/>
           </a:p>
@@ -2399,7 +2399,7 @@
           <a:p>
             <a:fld id="{21F19ACD-48F4-409C-8597-BFCE65646A84}" type="datetimeFigureOut">
               <a:rPr lang="en-MY" smtClean="0"/>
-              <a:t>16/7/2025</a:t>
+              <a:t>17/7/2025</a:t>
             </a:fld>
             <a:endParaRPr lang="en-MY"/>
           </a:p>
@@ -2688,7 +2688,7 @@
           <a:p>
             <a:fld id="{21F19ACD-48F4-409C-8597-BFCE65646A84}" type="datetimeFigureOut">
               <a:rPr lang="en-MY" smtClean="0"/>
-              <a:t>16/7/2025</a:t>
+              <a:t>17/7/2025</a:t>
             </a:fld>
             <a:endParaRPr lang="en-MY"/>
           </a:p>
@@ -2931,7 +2931,7 @@
           <a:p>
             <a:fld id="{21F19ACD-48F4-409C-8597-BFCE65646A84}" type="datetimeFigureOut">
               <a:rPr lang="en-MY" smtClean="0"/>
-              <a:t>16/7/2025</a:t>
+              <a:t>17/7/2025</a:t>
             </a:fld>
             <a:endParaRPr lang="en-MY"/>
           </a:p>
@@ -3370,9 +3370,21 @@
               <a:gd name="adj" fmla="val 4880"/>
             </a:avLst>
           </a:prstGeom>
-          <a:solidFill>
-            <a:srgbClr val="F3F4F7"/>
-          </a:solidFill>
+          <a:gradFill>
+            <a:gsLst>
+              <a:gs pos="0">
+                <a:srgbClr val="377562">
+                  <a:alpha val="25000"/>
+                </a:srgbClr>
+              </a:gs>
+              <a:gs pos="90000">
+                <a:srgbClr val="FFC000">
+                  <a:alpha val="25000"/>
+                </a:srgbClr>
+              </a:gs>
+            </a:gsLst>
+            <a:lin ang="540000" scaled="0"/>
+          </a:gradFill>
           <a:ln>
             <a:noFill/>
           </a:ln>
@@ -3593,20 +3605,13 @@
           </a:prstGeom>
           <a:gradFill>
             <a:gsLst>
-              <a:gs pos="100000">
-                <a:srgbClr val="FD3D74"/>
-              </a:gs>
-              <a:gs pos="100000">
-                <a:srgbClr val="FCA2B5"/>
-              </a:gs>
               <a:gs pos="0">
                 <a:srgbClr val="377562"/>
               </a:gs>
-              <a:gs pos="99000">
-                <a:srgbClr val="FFC000"/>
-              </a:gs>
-              <a:gs pos="100000">
-                <a:srgbClr val="FD3D74"/>
+              <a:gs pos="90000">
+                <a:srgbClr val="FFC000">
+                  <a:alpha val="58824"/>
+                </a:srgbClr>
               </a:gs>
             </a:gsLst>
             <a:lin ang="2700000" scaled="0"/>
